--- a/templates/decks/ubuntu-ltd-platform-briefing.pptx
+++ b/templates/decks/ubuntu-ltd-platform-briefing.pptx
@@ -3928,7 +3928,7 @@
                 </a:solidFill>
                 <a:latin typeface="Georgia"/>
               </a:rPr>
-              <a:t>Black-led infrastructure to land.</a:t>
+              <a:t>coordination to land.</a:t>
             </a:r>
           </a:p>
         </p:txBody>
@@ -4006,7 +4006,7 @@
                 </a:solidFill>
                 <a:latin typeface="Georgia"/>
               </a:rPr>
-              <a:t>What is missing is the Black-led delivery infrastructure that turns public intent into completed homes. Ubuntu LTD is that platform — Black-led, governance-tested, with 906 homes in the four-site Launchpad cohort breaking ground in 2026.</a:t>
+              <a:t>What is missing is the platform that turns public intent into completed homes — coordinating landowners, non-profit operators, and public capital into a single, repeatable model. Ubuntu LTD is that platform, with 906 homes in the four-site Launchpad cohort breaking ground in 2026.</a:t>
             </a:r>
           </a:p>
         </p:txBody>

--- a/templates/decks/ubuntu-ltd-platform-briefing.pptx
+++ b/templates/decks/ubuntu-ltd-platform-briefing.pptx
@@ -7408,7 +7408,7 @@
         </p:nvSpPr>
         <p:spPr>
           <a:xfrm>
-            <a:off x="0" y="502920"/>
+            <a:off x="0" y="457200"/>
             <a:ext cx="12191695" cy="365760"/>
           </a:xfrm>
           <a:prstGeom prst="rect">
@@ -7447,8 +7447,8 @@
         </p:nvSpPr>
         <p:spPr>
           <a:xfrm>
-            <a:off x="640080" y="1280160"/>
-            <a:ext cx="731520" cy="457200"/>
+            <a:off x="640080" y="1188720"/>
+            <a:ext cx="822960" cy="640080"/>
           </a:xfrm>
           <a:prstGeom prst="rect">
             <a:avLst/>
@@ -7467,7 +7467,7 @@
               </a:lnSpc>
             </a:pPr>
             <a:r>
-              <a:rPr sz="3600" b="0" i="1">
+              <a:rPr sz="4400" b="0" i="1">
                 <a:solidFill>
                   <a:srgbClr val="D4A04A"/>
                 </a:solidFill>
@@ -7486,33 +7486,33 @@
         </p:nvSpPr>
         <p:spPr>
           <a:xfrm>
-            <a:off x="1554480" y="1280160"/>
-            <a:ext cx="10058400" cy="365760"/>
-          </a:xfrm>
-          <a:prstGeom prst="rect">
-            <a:avLst/>
-          </a:prstGeom>
-          <a:noFill/>
-        </p:spPr>
-        <p:txBody>
-          <a:bodyPr wrap="square" lIns="0" rIns="0" tIns="0" bIns="0" anchor="t">
-            <a:spAutoFit/>
-          </a:bodyPr>
-          <a:lstStyle/>
-          <a:p>
-            <a:pPr algn="l">
-              <a:lnSpc>
-                <a:spcPct val="110000"/>
-              </a:lnSpc>
-            </a:pPr>
-            <a:r>
-              <a:rPr sz="1800" b="0" i="1">
+            <a:off x="1737360" y="1143000"/>
+            <a:ext cx="10058400" cy="502920"/>
+          </a:xfrm>
+          <a:prstGeom prst="rect">
+            <a:avLst/>
+          </a:prstGeom>
+          <a:noFill/>
+        </p:spPr>
+        <p:txBody>
+          <a:bodyPr wrap="square" lIns="0" rIns="0" tIns="0" bIns="0" anchor="t">
+            <a:spAutoFit/>
+          </a:bodyPr>
+          <a:lstStyle/>
+          <a:p>
+            <a:pPr algn="l">
+              <a:lnSpc>
+                <a:spcPct val="100000"/>
+              </a:lnSpc>
+            </a:pPr>
+            <a:r>
+              <a:rPr sz="2600" b="0" i="1">
                 <a:solidFill>
                   <a:srgbClr val="EBDFC4"/>
                 </a:solidFill>
                 <a:latin typeface="Georgia"/>
               </a:rPr>
-              <a:t>Advocacy within your circles.</a:t>
+              <a:t>A word.</a:t>
             </a:r>
           </a:p>
         </p:txBody>
@@ -7525,8 +7525,8 @@
         </p:nvSpPr>
         <p:spPr>
           <a:xfrm>
-            <a:off x="1554480" y="1737360"/>
-            <a:ext cx="10058400" cy="640080"/>
+            <a:off x="1737360" y="1691640"/>
+            <a:ext cx="10058400" cy="548640"/>
           </a:xfrm>
           <a:prstGeom prst="rect">
             <a:avLst/>
@@ -7551,7 +7551,7 @@
                 </a:solidFill>
                 <a:latin typeface="Georgia"/>
               </a:rPr>
-              <a:t>Speak to the inclusion of Black-led housing platforms as a named category in equity-deserving capital allocations. Ubuntu LTD does not seek a carve-out; we seek explicit visibility in the lens.</a:t>
+              <a:t>Mention Ubuntu LTD where you have influence — a colleague, a minister, a development partner. The signal is the value.</a:t>
             </a:r>
           </a:p>
         </p:txBody>
@@ -7564,8 +7564,8 @@
         </p:nvSpPr>
         <p:spPr>
           <a:xfrm>
-            <a:off x="640080" y="2468880"/>
-            <a:ext cx="731520" cy="457200"/>
+            <a:off x="640080" y="2331720"/>
+            <a:ext cx="822960" cy="640080"/>
           </a:xfrm>
           <a:prstGeom prst="rect">
             <a:avLst/>
@@ -7584,7 +7584,7 @@
               </a:lnSpc>
             </a:pPr>
             <a:r>
-              <a:rPr sz="3600" b="0" i="1">
+              <a:rPr sz="4400" b="0" i="1">
                 <a:solidFill>
                   <a:srgbClr val="D4A04A"/>
                 </a:solidFill>
@@ -7603,33 +7603,33 @@
         </p:nvSpPr>
         <p:spPr>
           <a:xfrm>
-            <a:off x="1554480" y="2468880"/>
-            <a:ext cx="10058400" cy="365760"/>
-          </a:xfrm>
-          <a:prstGeom prst="rect">
-            <a:avLst/>
-          </a:prstGeom>
-          <a:noFill/>
-        </p:spPr>
-        <p:txBody>
-          <a:bodyPr wrap="square" lIns="0" rIns="0" tIns="0" bIns="0" anchor="t">
-            <a:spAutoFit/>
-          </a:bodyPr>
-          <a:lstStyle/>
-          <a:p>
-            <a:pPr algn="l">
-              <a:lnSpc>
-                <a:spcPct val="110000"/>
-              </a:lnSpc>
-            </a:pPr>
-            <a:r>
-              <a:rPr sz="1800" b="0" i="1">
+            <a:off x="1737360" y="2286000"/>
+            <a:ext cx="10058400" cy="502920"/>
+          </a:xfrm>
+          <a:prstGeom prst="rect">
+            <a:avLst/>
+          </a:prstGeom>
+          <a:noFill/>
+        </p:spPr>
+        <p:txBody>
+          <a:bodyPr wrap="square" lIns="0" rIns="0" tIns="0" bIns="0" anchor="t">
+            <a:spAutoFit/>
+          </a:bodyPr>
+          <a:lstStyle/>
+          <a:p>
+            <a:pPr algn="l">
+              <a:lnSpc>
+                <a:spcPct val="100000"/>
+              </a:lnSpc>
+            </a:pPr>
+            <a:r>
+              <a:rPr sz="2600" b="0" i="1">
                 <a:solidFill>
                   <a:srgbClr val="EBDFC4"/>
                 </a:solidFill>
                 <a:latin typeface="Georgia"/>
               </a:rPr>
-              <a:t>Collaboration with local members, ministers and senior leadership at CMHC.</a:t>
+              <a:t>A meeting.</a:t>
             </a:r>
           </a:p>
         </p:txBody>
@@ -7642,8 +7642,8 @@
         </p:nvSpPr>
         <p:spPr>
           <a:xfrm>
-            <a:off x="1554480" y="2926080"/>
-            <a:ext cx="10058400" cy="640080"/>
+            <a:off x="1737360" y="2834640"/>
+            <a:ext cx="10058400" cy="548640"/>
           </a:xfrm>
           <a:prstGeom prst="rect">
             <a:avLst/>
@@ -7668,7 +7668,7 @@
                 </a:solidFill>
                 <a:latin typeface="Georgia"/>
               </a:rPr>
-              <a:t>A 30-minute briefing on the Common Ground mechanic and the Launchpad cohort. The purpose is alignment, not a funding request.</a:t>
+              <a:t>Thirty minutes with local members, ministers, or CMHC senior leadership. The Common Ground mechanic deserves the room. Alignment, not an ask.</a:t>
             </a:r>
           </a:p>
         </p:txBody>
@@ -7681,8 +7681,8 @@
         </p:nvSpPr>
         <p:spPr>
           <a:xfrm>
-            <a:off x="640080" y="3657600"/>
-            <a:ext cx="731520" cy="457200"/>
+            <a:off x="640080" y="3474720"/>
+            <a:ext cx="822960" cy="640080"/>
           </a:xfrm>
           <a:prstGeom prst="rect">
             <a:avLst/>
@@ -7701,7 +7701,7 @@
               </a:lnSpc>
             </a:pPr>
             <a:r>
-              <a:rPr sz="3600" b="0" i="1">
+              <a:rPr sz="4400" b="0" i="1">
                 <a:solidFill>
                   <a:srgbClr val="D4A04A"/>
                 </a:solidFill>
@@ -7720,33 +7720,33 @@
         </p:nvSpPr>
         <p:spPr>
           <a:xfrm>
-            <a:off x="1554480" y="3657600"/>
-            <a:ext cx="10058400" cy="365760"/>
-          </a:xfrm>
-          <a:prstGeom prst="rect">
-            <a:avLst/>
-          </a:prstGeom>
-          <a:noFill/>
-        </p:spPr>
-        <p:txBody>
-          <a:bodyPr wrap="square" lIns="0" rIns="0" tIns="0" bIns="0" anchor="t">
-            <a:spAutoFit/>
-          </a:bodyPr>
-          <a:lstStyle/>
-          <a:p>
-            <a:pPr algn="l">
-              <a:lnSpc>
-                <a:spcPct val="110000"/>
-              </a:lnSpc>
-            </a:pPr>
-            <a:r>
-              <a:rPr sz="1800" b="0" i="1">
+            <a:off x="1737360" y="3429000"/>
+            <a:ext cx="10058400" cy="502920"/>
+          </a:xfrm>
+          <a:prstGeom prst="rect">
+            <a:avLst/>
+          </a:prstGeom>
+          <a:noFill/>
+        </p:spPr>
+        <p:txBody>
+          <a:bodyPr wrap="square" lIns="0" rIns="0" tIns="0" bIns="0" anchor="t">
+            <a:spAutoFit/>
+          </a:bodyPr>
+          <a:lstStyle/>
+          <a:p>
+            <a:pPr algn="l">
+              <a:lnSpc>
+                <a:spcPct val="100000"/>
+              </a:lnSpc>
+            </a:pPr>
+            <a:r>
+              <a:rPr sz="2600" b="0" i="1">
                 <a:solidFill>
                   <a:srgbClr val="EBDFC4"/>
                 </a:solidFill>
                 <a:latin typeface="Georgia"/>
               </a:rPr>
-              <a:t>Opportunities for further engagement.</a:t>
+              <a:t>A seat.</a:t>
             </a:r>
           </a:p>
         </p:txBody>
@@ -7759,8 +7759,8 @@
         </p:nvSpPr>
         <p:spPr>
           <a:xfrm>
-            <a:off x="1554480" y="4114800"/>
-            <a:ext cx="10058400" cy="640080"/>
+            <a:off x="1737360" y="3977640"/>
+            <a:ext cx="10058400" cy="548640"/>
           </a:xfrm>
           <a:prstGeom prst="rect">
             <a:avLst/>
@@ -7785,7 +7785,7 @@
                 </a:solidFill>
                 <a:latin typeface="Georgia"/>
               </a:rPr>
-              <a:t>If there is a committee, working group, or caucus hearing housing-delivery evidence, Ubuntu LTD is prepared with substantive material on the four-step model and the 2026 Launchpad delivery.</a:t>
+              <a:t>At a committee, caucus, or working group hearing housing-delivery evidence. We arrive ready with the four-step model and the 906-home Launchpad cohort.</a:t>
             </a:r>
           </a:p>
         </p:txBody>
@@ -7798,7 +7798,7 @@
         </p:nvCxnSpPr>
         <p:spPr>
           <a:xfrm>
-            <a:off x="1828800" y="4983480"/>
+            <a:off x="1828800" y="4800600"/>
             <a:ext cx="8503920" cy="0"/>
           </a:xfrm>
           <a:prstGeom prst="line">
@@ -7833,8 +7833,8 @@
         </p:nvSpPr>
         <p:spPr>
           <a:xfrm>
-            <a:off x="457200" y="5166360"/>
-            <a:ext cx="11338560" cy="548640"/>
+            <a:off x="457200" y="4937760"/>
+            <a:ext cx="11338560" cy="457200"/>
           </a:xfrm>
           <a:prstGeom prst="rect">
             <a:avLst/>
@@ -7859,7 +7859,7 @@
                 </a:solidFill>
                 <a:latin typeface="Georgia"/>
               </a:rPr>
-              <a:t>Ubuntu LTD is built to operate within the housing apparatus,</a:t>
+              <a:t>Capital is committed. Sites are secured. Partners are in place.</a:t>
             </a:r>
           </a:p>
         </p:txBody>
@@ -7872,8 +7872,8 @@
         </p:nvSpPr>
         <p:spPr>
           <a:xfrm>
-            <a:off x="457200" y="5440680"/>
-            <a:ext cx="11338560" cy="548640"/>
+            <a:off x="457200" y="5257800"/>
+            <a:ext cx="11338560" cy="457200"/>
           </a:xfrm>
           <a:prstGeom prst="rect">
             <a:avLst/>
@@ -7888,17 +7888,17 @@
           <a:p>
             <a:pPr algn="ctr">
               <a:lnSpc>
-                <a:spcPct val="130000"/>
-              </a:lnSpc>
-            </a:pPr>
-            <a:r>
-              <a:rPr sz="1500" b="0" i="1">
+                <a:spcPct val="120000"/>
+              </a:lnSpc>
+            </a:pPr>
+            <a:r>
+              <a:rPr sz="2000" b="0" i="1">
                 <a:solidFill>
                   <a:srgbClr val="D4A04A"/>
                 </a:solidFill>
                 <a:latin typeface="Georgia"/>
               </a:rPr>
-              <a:t>not adjacent to it. Your advocacy turns capacity into homes faster.</a:t>
+              <a:t>What's missing is your voice.</a:t>
             </a:r>
           </a:p>
         </p:txBody>
@@ -7911,8 +7911,8 @@
         </p:nvSpPr>
         <p:spPr>
           <a:xfrm>
-            <a:off x="0" y="5989320"/>
-            <a:ext cx="12191695" cy="411480"/>
+            <a:off x="0" y="5897880"/>
+            <a:ext cx="12191695" cy="292608"/>
           </a:xfrm>
           <a:prstGeom prst="rect">
             <a:avLst/>
@@ -7927,24 +7927,63 @@
           <a:p>
             <a:pPr algn="ctr">
               <a:lnSpc>
-                <a:spcPct val="100000"/>
-              </a:lnSpc>
-            </a:pPr>
-            <a:r>
-              <a:rPr sz="3000" b="0" i="0">
+                <a:spcPct val="120000"/>
+              </a:lnSpc>
+            </a:pPr>
+            <a:r>
+              <a:rPr sz="800" b="0" i="0">
+                <a:solidFill>
+                  <a:srgbClr val="D4A04A"/>
+                </a:solidFill>
+                <a:latin typeface="Consolas"/>
+              </a:rPr>
+              <a:t>DIRECT LINE</a:t>
+            </a:r>
+          </a:p>
+        </p:txBody>
+      </p:sp>
+      <p:sp>
+        <p:nvSpPr>
+          <p:cNvPr id="18" name="TextBox 17"/>
+          <p:cNvSpPr txBox="1"/>
+          <p:nvPr/>
+        </p:nvSpPr>
+        <p:spPr>
+          <a:xfrm>
+            <a:off x="0" y="6126480"/>
+            <a:ext cx="12191695" cy="292608"/>
+          </a:xfrm>
+          <a:prstGeom prst="rect">
+            <a:avLst/>
+          </a:prstGeom>
+          <a:noFill/>
+        </p:spPr>
+        <p:txBody>
+          <a:bodyPr wrap="square" lIns="0" rIns="0" tIns="0" bIns="0" anchor="t">
+            <a:spAutoFit/>
+          </a:bodyPr>
+          <a:lstStyle/>
+          <a:p>
+            <a:pPr algn="ctr">
+              <a:lnSpc>
+                <a:spcPct val="120000"/>
+              </a:lnSpc>
+            </a:pPr>
+            <a:r>
+              <a:rPr sz="1200" b="0" i="1">
                 <a:solidFill>
                   <a:srgbClr val="EBDFC4"/>
                 </a:solidFill>
                 <a:latin typeface="Georgia"/>
               </a:rPr>
-              <a:t>Ubuntu</a:t>
-            </a:r>
-          </a:p>
-        </p:txBody>
-      </p:sp>
-      <p:sp>
-        <p:nvSpPr>
-          <p:cNvPr id="18" name="TextBox 17"/>
+              <a:t>Jonathan Okubay  ·  Managing Director  ·  jonathan@ubuntultd.com  ·  +1 647 740 9784</a:t>
+            </a:r>
+          </a:p>
+        </p:txBody>
+      </p:sp>
+      <p:sp>
+        <p:nvSpPr>
+          <p:cNvPr id="19" name="TextBox 18"/>
           <p:cNvSpPr txBox="1"/>
           <p:nvPr/>
         </p:nvSpPr>
@@ -7970,20 +8009,20 @@
               </a:lnSpc>
             </a:pPr>
             <a:r>
-              <a:rPr sz="900" b="0" i="0">
+              <a:rPr sz="850" b="0" i="0">
                 <a:solidFill>
                   <a:srgbClr val="D4A04A"/>
                 </a:solidFill>
                 <a:latin typeface="Consolas"/>
               </a:rPr>
-              <a:t>INFO@UBUNTULTD.COM     ·     UBUNTULTD.COM     ·     TORONTO, ON</a:t>
-            </a:r>
-          </a:p>
-        </p:txBody>
-      </p:sp>
-      <p:sp>
-        <p:nvSpPr>
-          <p:cNvPr id="19" name="Rectangle 18"/>
+              <a:t>UBUNTULTD.COM     ·     INFO@UBUNTULTD.COM     ·     TORONTO, ON</a:t>
+            </a:r>
+          </a:p>
+        </p:txBody>
+      </p:sp>
+      <p:sp>
+        <p:nvSpPr>
+          <p:cNvPr id="20" name="Rectangle 19"/>
           <p:cNvSpPr/>
           <p:nvPr/>
         </p:nvSpPr>
